--- a/decks/output/10-staff-experience-v0.pptx
+++ b/decks/output/10-staff-experience-v0.pptx
@@ -20,7 +20,6 @@
     <p:sldId id="268" r:id="rId19"/>
     <p:sldId id="269" r:id="rId20"/>
     <p:sldId id="270" r:id="rId21"/>
-    <p:sldId id="271" r:id="rId22"/>
   </p:sldIdLst>
   <p:sldSz cx="12192000" cy="6858000" type="screen4x3"/>
   <p:notesSz cx="6858000" cy="9144000"/>
@@ -3484,7 +3483,7 @@
                 </a:solidFill>
                 <a:latin typeface="DM Sans"/>
               </a:rPr>
-              <a:t>10 · The Staff Experience · 10/16</a:t>
+              <a:t>10 · The Staff Experience · 10/15</a:t>
             </a:r>
           </a:p>
         </p:txBody>
@@ -3774,7 +3773,7 @@
                 </a:solidFill>
                 <a:latin typeface="DM Sans"/>
               </a:rPr>
-              <a:t>10 · The Staff Experience · 11/16</a:t>
+              <a:t>10 · The Staff Experience · 11/15</a:t>
             </a:r>
           </a:p>
         </p:txBody>
@@ -3929,7 +3928,7 @@
                 </a:solidFill>
                 <a:latin typeface="DM Sans"/>
               </a:rPr>
-              <a:t>10 · The Staff Experience · 12/16</a:t>
+              <a:t>10 · The Staff Experience · 12/15</a:t>
             </a:r>
           </a:p>
         </p:txBody>
@@ -3968,8 +3967,8 @@
         </p:nvSpPr>
         <p:spPr>
           <a:xfrm>
-            <a:off x="800000" y="500000"/>
-            <a:ext cx="10500000" cy="700000"/>
+            <a:off x="1200000" y="2200000"/>
+            <a:ext cx="9700000" cy="1500000"/>
           </a:xfrm>
           <a:prstGeom prst="rect">
             <a:avLst/>
@@ -3982,73 +3981,43 @@
           </a:bodyPr>
           <a:lstStyle/>
           <a:p>
-            <a:pPr algn="l"/>
-            <a:r>
-              <a:rPr sz="3200" b="1">
+            <a:pPr algn="ctr"/>
+            <a:r>
+              <a:rPr sz="4400" b="1">
                 <a:solidFill>
                   <a:srgbClr val="0E1411"/>
                 </a:solidFill>
-                <a:latin typeface="DM Sans"/>
+                <a:latin typeface="Playfair Display"/>
               </a:rPr>
-              <a:t>Two apps, distinct icons</a:t>
-            </a:r>
-          </a:p>
-        </p:txBody>
-      </p:sp>
-      <p:sp>
-        <p:nvSpPr>
-          <p:cNvPr id="3" name="Rectangle 2"/>
-          <p:cNvSpPr/>
-          <p:nvPr/>
-        </p:nvSpPr>
-        <p:spPr>
-          <a:xfrm>
-            <a:off x="800000" y="1500000"/>
-            <a:ext cx="5800000" cy="4500000"/>
-          </a:xfrm>
-          <a:prstGeom prst="rect">
-            <a:avLst/>
-          </a:prstGeom>
-          <a:solidFill>
-            <a:srgbClr val="FBF7EF"/>
-          </a:solidFill>
-          <a:ln>
-            <a:solidFill>
-              <a:srgbClr val="D8CFBE"/>
-            </a:solidFill>
-          </a:ln>
-        </p:spPr>
-        <p:style>
-          <a:lnRef idx="1">
-            <a:schemeClr val="accent1"/>
-          </a:lnRef>
-          <a:fillRef idx="3">
-            <a:schemeClr val="accent1"/>
-          </a:fillRef>
-          <a:effectRef idx="2">
-            <a:schemeClr val="accent1"/>
-          </a:effectRef>
-          <a:fontRef idx="minor">
-            <a:schemeClr val="lt1"/>
-          </a:fontRef>
-        </p:style>
-        <p:txBody>
-          <a:bodyPr rtlCol="0" anchor="ctr"/>
-          <a:lstStyle/>
-          <a:p>
-            <a:pPr algn="ctr"/>
-            <a:r>
-              <a:rPr sz="1100">
-                <a:solidFill>
-                  <a:srgbClr val="8B6B22"/>
-                </a:solidFill>
-                <a:latin typeface="DM Sans"/>
-              </a:rPr>
-              <a:t>[REPLACE: S24-home-screen-icons.png]</a:t>
-            </a:r>
-          </a:p>
-        </p:txBody>
-      </p:sp>
+              <a:t>One staff voice.</a:t>
+            </a:r>
+          </a:p>
+        </p:txBody>
+      </p:sp>
+      <p:pic>
+        <p:nvPicPr>
+          <p:cNvPr id="3" name="Picture 2" descr="gold-deco-hairline.png"/>
+          <p:cNvPicPr>
+            <a:picLocks noChangeAspect="1"/>
+          </p:cNvPicPr>
+          <p:nvPr/>
+        </p:nvPicPr>
+        <p:blipFill>
+          <a:blip r:embed="rId2"/>
+          <a:stretch>
+            <a:fillRect/>
+          </a:stretch>
+        </p:blipFill>
+        <p:spPr>
+          <a:xfrm>
+            <a:off x="5896000" y="3800000"/>
+            <a:ext cx="400000" cy="20000"/>
+          </a:xfrm>
+          <a:prstGeom prst="rect">
+            <a:avLst/>
+          </a:prstGeom>
+        </p:spPr>
+      </p:pic>
       <p:sp>
         <p:nvSpPr>
           <p:cNvPr id="4" name="TextBox 3"/>
@@ -4057,8 +4026,8 @@
         </p:nvSpPr>
         <p:spPr>
           <a:xfrm>
-            <a:off x="7100000" y="1500000"/>
-            <a:ext cx="4200000" cy="1100000"/>
+            <a:off x="1500000" y="4100000"/>
+            <a:ext cx="9100000" cy="1200000"/>
           </a:xfrm>
           <a:prstGeom prst="rect">
             <a:avLst/>
@@ -4071,15 +4040,15 @@
           </a:bodyPr>
           <a:lstStyle/>
           <a:p>
-            <a:pPr algn="l"/>
-            <a:r>
-              <a:rPr sz="1600" b="0">
+            <a:pPr algn="ctr"/>
+            <a:r>
+              <a:rPr sz="2200" b="0">
                 <a:solidFill>
                   <a:srgbClr val="1A1714"/>
                 </a:solidFill>
                 <a:latin typeface="DM Sans"/>
               </a:rPr>
-              <a:t>①  Green clock badge for Staff Attendance.</a:t>
+              <a:t>"&lt;Q05&gt;"</a:t>
             </a:r>
           </a:p>
         </p:txBody>
@@ -4092,8 +4061,8 @@
         </p:nvSpPr>
         <p:spPr>
           <a:xfrm>
-            <a:off x="7100000" y="2800000"/>
-            <a:ext cx="4200000" cy="1100000"/>
+            <a:off x="8000000" y="6500000"/>
+            <a:ext cx="4000000" cy="300000"/>
           </a:xfrm>
           <a:prstGeom prst="rect">
             <a:avLst/>
@@ -4106,120 +4075,15 @@
           </a:bodyPr>
           <a:lstStyle/>
           <a:p>
-            <a:pPr algn="l"/>
-            <a:r>
-              <a:rPr sz="1600" b="0">
-                <a:solidFill>
-                  <a:srgbClr val="1A1714"/>
+            <a:pPr algn="r"/>
+            <a:r>
+              <a:rPr sz="1100" b="0">
+                <a:solidFill>
+                  <a:srgbClr val="D8CFBE"/>
                 </a:solidFill>
                 <a:latin typeface="DM Sans"/>
               </a:rPr>
-              <a:t>②  Gold user-plus badge for SmartGate.</a:t>
-            </a:r>
-          </a:p>
-        </p:txBody>
-      </p:sp>
-      <p:sp>
-        <p:nvSpPr>
-          <p:cNvPr id="6" name="TextBox 5"/>
-          <p:cNvSpPr txBox="1"/>
-          <p:nvPr/>
-        </p:nvSpPr>
-        <p:spPr>
-          <a:xfrm>
-            <a:off x="7100000" y="4100000"/>
-            <a:ext cx="4200000" cy="1100000"/>
-          </a:xfrm>
-          <a:prstGeom prst="rect">
-            <a:avLst/>
-          </a:prstGeom>
-          <a:noFill/>
-        </p:spPr>
-        <p:txBody>
-          <a:bodyPr wrap="square">
-            <a:spAutoFit/>
-          </a:bodyPr>
-          <a:lstStyle/>
-          <a:p>
-            <a:pPr algn="l"/>
-            <a:r>
-              <a:rPr sz="1600" b="0">
-                <a:solidFill>
-                  <a:srgbClr val="1A1714"/>
-                </a:solidFill>
-                <a:latin typeface="DM Sans"/>
-              </a:rPr>
-              <a:t>③  Find the right app at a glance.</a:t>
-            </a:r>
-          </a:p>
-        </p:txBody>
-      </p:sp>
-      <p:sp>
-        <p:nvSpPr>
-          <p:cNvPr id="7" name="TextBox 6"/>
-          <p:cNvSpPr txBox="1"/>
-          <p:nvPr/>
-        </p:nvSpPr>
-        <p:spPr>
-          <a:xfrm>
-            <a:off x="800000" y="6100000"/>
-            <a:ext cx="10500000" cy="300000"/>
-          </a:xfrm>
-          <a:prstGeom prst="rect">
-            <a:avLst/>
-          </a:prstGeom>
-          <a:noFill/>
-        </p:spPr>
-        <p:txBody>
-          <a:bodyPr wrap="square">
-            <a:spAutoFit/>
-          </a:bodyPr>
-          <a:lstStyle/>
-          <a:p>
-            <a:pPr algn="l"/>
-            <a:r>
-              <a:rPr sz="1100" b="0">
-                <a:solidFill>
-                  <a:srgbClr val="8B6B22"/>
-                </a:solidFill>
-                <a:latin typeface="DM Sans"/>
-              </a:rPr>
-              <a:t>Home screen, both apps installed.</a:t>
-            </a:r>
-          </a:p>
-        </p:txBody>
-      </p:sp>
-      <p:sp>
-        <p:nvSpPr>
-          <p:cNvPr id="8" name="TextBox 7"/>
-          <p:cNvSpPr txBox="1"/>
-          <p:nvPr/>
-        </p:nvSpPr>
-        <p:spPr>
-          <a:xfrm>
-            <a:off x="8000000" y="6500000"/>
-            <a:ext cx="4000000" cy="300000"/>
-          </a:xfrm>
-          <a:prstGeom prst="rect">
-            <a:avLst/>
-          </a:prstGeom>
-          <a:noFill/>
-        </p:spPr>
-        <p:txBody>
-          <a:bodyPr wrap="square">
-            <a:spAutoFit/>
-          </a:bodyPr>
-          <a:lstStyle/>
-          <a:p>
-            <a:pPr algn="r"/>
-            <a:r>
-              <a:rPr sz="1100" b="0">
-                <a:solidFill>
-                  <a:srgbClr val="D8CFBE"/>
-                </a:solidFill>
-                <a:latin typeface="DM Sans"/>
-              </a:rPr>
-              <a:t>10 · The Staff Experience · 13/16</a:t>
+              <a:t>10 · The Staff Experience · 13/15</a:t>
             </a:r>
           </a:p>
         </p:txBody>
@@ -4233,161 +4097,6 @@
 </file>
 
 <file path=ppt/slides/slide14.xml><?xml version="1.0" encoding="utf-8"?>
-<p:sld xmlns:a="http://schemas.openxmlformats.org/drawingml/2006/main" xmlns:p="http://schemas.openxmlformats.org/presentationml/2006/main" xmlns:r="http://schemas.openxmlformats.org/officeDocument/2006/relationships">
-  <p:cSld>
-    <p:bg>
-      <p:bgPr>
-        <a:solidFill>
-          <a:srgbClr val="F6F1E7"/>
-        </a:solidFill>
-        <a:effectLst/>
-      </p:bgPr>
-    </p:bg>
-    <p:spTree>
-      <p:nvGrpSpPr>
-        <p:cNvPr id="1" name=""/>
-        <p:cNvGrpSpPr/>
-        <p:nvPr/>
-      </p:nvGrpSpPr>
-      <p:grpSpPr/>
-      <p:sp>
-        <p:nvSpPr>
-          <p:cNvPr id="2" name="TextBox 1"/>
-          <p:cNvSpPr txBox="1"/>
-          <p:nvPr/>
-        </p:nvSpPr>
-        <p:spPr>
-          <a:xfrm>
-            <a:off x="1200000" y="2200000"/>
-            <a:ext cx="9700000" cy="1500000"/>
-          </a:xfrm>
-          <a:prstGeom prst="rect">
-            <a:avLst/>
-          </a:prstGeom>
-          <a:noFill/>
-        </p:spPr>
-        <p:txBody>
-          <a:bodyPr wrap="square">
-            <a:spAutoFit/>
-          </a:bodyPr>
-          <a:lstStyle/>
-          <a:p>
-            <a:pPr algn="ctr"/>
-            <a:r>
-              <a:rPr sz="4400" b="1">
-                <a:solidFill>
-                  <a:srgbClr val="0E1411"/>
-                </a:solidFill>
-                <a:latin typeface="Playfair Display"/>
-              </a:rPr>
-              <a:t>One staff voice.</a:t>
-            </a:r>
-          </a:p>
-        </p:txBody>
-      </p:sp>
-      <p:pic>
-        <p:nvPicPr>
-          <p:cNvPr id="3" name="Picture 2" descr="gold-deco-hairline.png"/>
-          <p:cNvPicPr>
-            <a:picLocks noChangeAspect="1"/>
-          </p:cNvPicPr>
-          <p:nvPr/>
-        </p:nvPicPr>
-        <p:blipFill>
-          <a:blip r:embed="rId2"/>
-          <a:stretch>
-            <a:fillRect/>
-          </a:stretch>
-        </p:blipFill>
-        <p:spPr>
-          <a:xfrm>
-            <a:off x="5896000" y="3800000"/>
-            <a:ext cx="400000" cy="20000"/>
-          </a:xfrm>
-          <a:prstGeom prst="rect">
-            <a:avLst/>
-          </a:prstGeom>
-        </p:spPr>
-      </p:pic>
-      <p:sp>
-        <p:nvSpPr>
-          <p:cNvPr id="4" name="TextBox 3"/>
-          <p:cNvSpPr txBox="1"/>
-          <p:nvPr/>
-        </p:nvSpPr>
-        <p:spPr>
-          <a:xfrm>
-            <a:off x="1500000" y="4100000"/>
-            <a:ext cx="9100000" cy="1200000"/>
-          </a:xfrm>
-          <a:prstGeom prst="rect">
-            <a:avLst/>
-          </a:prstGeom>
-          <a:noFill/>
-        </p:spPr>
-        <p:txBody>
-          <a:bodyPr wrap="square">
-            <a:spAutoFit/>
-          </a:bodyPr>
-          <a:lstStyle/>
-          <a:p>
-            <a:pPr algn="ctr"/>
-            <a:r>
-              <a:rPr sz="2200" b="0">
-                <a:solidFill>
-                  <a:srgbClr val="1A1714"/>
-                </a:solidFill>
-                <a:latin typeface="DM Sans"/>
-              </a:rPr>
-              <a:t>"&lt;Q05&gt;"</a:t>
-            </a:r>
-          </a:p>
-        </p:txBody>
-      </p:sp>
-      <p:sp>
-        <p:nvSpPr>
-          <p:cNvPr id="5" name="TextBox 4"/>
-          <p:cNvSpPr txBox="1"/>
-          <p:nvPr/>
-        </p:nvSpPr>
-        <p:spPr>
-          <a:xfrm>
-            <a:off x="8000000" y="6500000"/>
-            <a:ext cx="4000000" cy="300000"/>
-          </a:xfrm>
-          <a:prstGeom prst="rect">
-            <a:avLst/>
-          </a:prstGeom>
-          <a:noFill/>
-        </p:spPr>
-        <p:txBody>
-          <a:bodyPr wrap="square">
-            <a:spAutoFit/>
-          </a:bodyPr>
-          <a:lstStyle/>
-          <a:p>
-            <a:pPr algn="r"/>
-            <a:r>
-              <a:rPr sz="1100" b="0">
-                <a:solidFill>
-                  <a:srgbClr val="D8CFBE"/>
-                </a:solidFill>
-                <a:latin typeface="DM Sans"/>
-              </a:rPr>
-              <a:t>10 · The Staff Experience · 14/16</a:t>
-            </a:r>
-          </a:p>
-        </p:txBody>
-      </p:sp>
-    </p:spTree>
-  </p:cSld>
-  <p:clrMapOvr>
-    <a:masterClrMapping/>
-  </p:clrMapOvr>
-</p:sld>
-</file>
-
-<file path=ppt/slides/slide15.xml><?xml version="1.0" encoding="utf-8"?>
 <p:sld xmlns:a="http://schemas.openxmlformats.org/drawingml/2006/main" xmlns:p="http://schemas.openxmlformats.org/presentationml/2006/main" xmlns:r="http://schemas.openxmlformats.org/officeDocument/2006/relationships">
   <p:cSld>
     <p:bg>
@@ -4472,7 +4181,7 @@
 </p:sld>
 </file>
 
-<file path=ppt/slides/slide16.xml><?xml version="1.0" encoding="utf-8"?>
+<file path=ppt/slides/slide15.xml><?xml version="1.0" encoding="utf-8"?>
 <p:sld xmlns:a="http://schemas.openxmlformats.org/drawingml/2006/main" xmlns:p="http://schemas.openxmlformats.org/presentationml/2006/main" xmlns:r="http://schemas.openxmlformats.org/officeDocument/2006/relationships">
   <p:cSld>
     <p:bg>
@@ -4800,7 +4509,7 @@
                 </a:solidFill>
                 <a:latin typeface="DM Sans"/>
               </a:rPr>
-              <a:t>10 · The Staff Experience · 16/16</a:t>
+              <a:t>10 · The Staff Experience · 15/15</a:t>
             </a:r>
           </a:p>
         </p:txBody>
@@ -4981,7 +4690,7 @@
                 </a:solidFill>
                 <a:latin typeface="DM Sans"/>
               </a:rPr>
-              <a:t>10 · The Staff Experience · 03/16</a:t>
+              <a:t>10 · The Staff Experience · 03/15</a:t>
             </a:r>
           </a:p>
         </p:txBody>
@@ -5136,7 +4845,7 @@
                 </a:solidFill>
                 <a:latin typeface="DM Sans"/>
               </a:rPr>
-              <a:t>10 · The Staff Experience · 04/16</a:t>
+              <a:t>10 · The Staff Experience · 04/15</a:t>
             </a:r>
           </a:p>
         </p:txBody>
@@ -5426,7 +5135,7 @@
                 </a:solidFill>
                 <a:latin typeface="DM Sans"/>
               </a:rPr>
-              <a:t>10 · The Staff Experience · 05/16</a:t>
+              <a:t>10 · The Staff Experience · 05/15</a:t>
             </a:r>
           </a:p>
         </p:txBody>
@@ -5581,7 +5290,7 @@
                 </a:solidFill>
                 <a:latin typeface="DM Sans"/>
               </a:rPr>
-              <a:t>10 · The Staff Experience · 06/16</a:t>
+              <a:t>10 · The Staff Experience · 06/15</a:t>
             </a:r>
           </a:p>
         </p:txBody>
@@ -5871,7 +5580,7 @@
                 </a:solidFill>
                 <a:latin typeface="DM Sans"/>
               </a:rPr>
-              <a:t>10 · The Staff Experience · 07/16</a:t>
+              <a:t>10 · The Staff Experience · 07/15</a:t>
             </a:r>
           </a:p>
         </p:txBody>
@@ -6161,7 +5870,7 @@
                 </a:solidFill>
                 <a:latin typeface="DM Sans"/>
               </a:rPr>
-              <a:t>10 · The Staff Experience · 08/16</a:t>
+              <a:t>10 · The Staff Experience · 08/15</a:t>
             </a:r>
           </a:p>
         </p:txBody>
@@ -6316,7 +6025,7 @@
                 </a:solidFill>
                 <a:latin typeface="DM Sans"/>
               </a:rPr>
-              <a:t>10 · The Staff Experience · 09/16</a:t>
+              <a:t>10 · The Staff Experience · 09/15</a:t>
             </a:r>
           </a:p>
         </p:txBody>
